--- a/Brain_Registration_Pipeline_and_Comparison.pptx
+++ b/Brain_Registration_Pipeline_and_Comparison.pptx
@@ -4575,14 +4575,14 @@
       <p:grpSpPr/>
       <p:pic>
         <p:nvPicPr>
-          <p:cNvPr id="2" name="Picture 1" descr="themed_07.png"/>
+          <p:cNvPr id="2" name="Picture 1" descr="slide_07_new.png"/>
           <p:cNvPicPr>
             <a:picLocks noChangeAspect="1"/>
           </p:cNvPicPr>
           <p:nvPr/>
         </p:nvPicPr>
         <p:blipFill>
-          <a:blip r:embed="rId2"/>
+          <a:blip r:embed="rId3"/>
           <a:stretch>
             <a:fillRect/>
           </a:stretch>
@@ -4617,14 +4617,14 @@
       <p:grpSpPr/>
       <p:pic>
         <p:nvPicPr>
-          <p:cNvPr id="2" name="Picture 1" descr="themed_08.png"/>
+          <p:cNvPr id="2" name="Picture 1" descr="slide_08_new.png"/>
           <p:cNvPicPr>
             <a:picLocks noChangeAspect="1"/>
           </p:cNvPicPr>
           <p:nvPr/>
         </p:nvPicPr>
         <p:blipFill>
-          <a:blip r:embed="rId2"/>
+          <a:blip r:embed="rId3"/>
           <a:stretch>
             <a:fillRect/>
           </a:stretch>
@@ -4659,14 +4659,14 @@
       <p:grpSpPr/>
       <p:pic>
         <p:nvPicPr>
-          <p:cNvPr id="2" name="Picture 1" descr="themed_09.png"/>
+          <p:cNvPr id="2" name="Picture 1" descr="slide_09_new.png"/>
           <p:cNvPicPr>
             <a:picLocks noChangeAspect="1"/>
           </p:cNvPicPr>
           <p:nvPr/>
         </p:nvPicPr>
         <p:blipFill>
-          <a:blip r:embed="rId2"/>
+          <a:blip r:embed="rId3"/>
           <a:stretch>
             <a:fillRect/>
           </a:stretch>
